--- a/산출물/교재/PPTX/통합반_온라인/통합반_01일차.pptx
+++ b/산출물/교재/PPTX/통합반_온라인/통합반_01일차.pptx
@@ -10762,7 +10762,7 @@
       </p:sp>
       <p:pic>
         <p:nvPicPr>
-          <p:cNvPr id="6" name="삽화:설비_유압파워팩.svg" descr="illust_3171348531982362707_1791959960.png"/>
+          <p:cNvPr id="6" name="삽화:설비_유압파워팩.svg" descr="illust_1821459035155460490_1791959960.png"/>
           <p:cNvPicPr>
             <a:picLocks noChangeAspect="1"/>
           </p:cNvPicPr>
@@ -12681,7 +12681,7 @@
                 <a:ea typeface="맑은 고딕"/>
                 <a:cs typeface="맑은 고딕"/>
               </a:rPr>
-              <a:t>• 펌프 마모나 내부 누설을 뜻한다</a:t>
+              <a:t>• 펌프 마모나 내부 누설을 의심한다</a:t>
             </a:r>
           </a:p>
         </p:txBody>
@@ -17004,7 +17004,7 @@
       </p:sp>
       <p:pic>
         <p:nvPicPr>
-          <p:cNvPr id="6" name="삽화:리니지_1_MQTT.svg" descr="illust_1451473793492774121_1791978726.png"/>
+          <p:cNvPr id="6" name="삽화:리니지_1_MQTT.svg" descr="illust_7205808721888646715_1791978726.png"/>
           <p:cNvPicPr>
             <a:picLocks noChangeAspect="1"/>
           </p:cNvPicPr>
@@ -25335,7 +25335,7 @@
                 <a:ea typeface="맑은 고딕"/>
                 <a:cs typeface="맑은 고딕"/>
               </a:rPr>
-              <a:t>이상 이벤트는 일어난 일을 남긴 기록이며, 경보에는 식별자와 발생 당시의 근거 값이 함께 실린다.</a:t>
+              <a:t>이상 이벤트는 이상 조건의 발생·해제 기록이며, 경보에는 식별자와 당시의 근거 값이 실린다.</a:t>
             </a:r>
           </a:p>
         </p:txBody>
@@ -25612,7 +25612,7 @@
                 <a:ea typeface="맑은 고딕"/>
                 <a:cs typeface="맑은 고딕"/>
               </a:rPr>
-              <a:t>values     TS1 55.71, CE 46.2</a:t>
+              <a:t>evidence.values  TS1 55.71, CE 46.2</a:t>
             </a:r>
           </a:p>
         </p:txBody>
@@ -25780,7 +25780,7 @@
                 <a:ea typeface="맑은 고딕"/>
                 <a:cs typeface="맑은 고딕"/>
               </a:rPr>
-              <a:t>values</a:t>
+              <a:t>evidence.values</a:t>
             </a:r>
           </a:p>
           <a:p>
@@ -25801,7 +25801,7 @@
                 <a:ea typeface="맑은 고딕"/>
                 <a:cs typeface="맑은 고딕"/>
               </a:rPr>
-              <a:t>판정 당시의 근거 값(evidence)이다. 계측값은 계속 바뀌므로 근거를 경보에 붙여 둔다.</a:t>
+              <a:t>판정 당시의 근거 값이다. 계측값은 계속 바뀌므로 사용한 값을 경보에 붙여 둔다.</a:t>
             </a:r>
           </a:p>
         </p:txBody>
@@ -32773,7 +32773,7 @@
                 <a:ea typeface="맑은 고딕"/>
                 <a:cs typeface="맑은 고딕"/>
               </a:rPr>
-              <a:t>11:13:08   value 55.71 </a:t>
+              <a:t>11:13:08   mean 55.71 </a:t>
             </a:r>
             <a:r>
               <a:rPr sz="1300" b="0">
@@ -34992,7 +34992,7 @@
       </p:sp>
       <p:pic>
         <p:nvPicPr>
-          <p:cNvPr id="6" name="삽화:계층_0_전체.svg" descr="illust_8402894765765171047_1791959960.png"/>
+          <p:cNvPr id="6" name="삽화:계층_0_전체.svg" descr="illust_5616354563874536935_1791959960.png"/>
           <p:cNvPicPr>
             <a:picLocks noChangeAspect="1"/>
           </p:cNvPicPr>
@@ -35734,7 +35734,7 @@
       </p:sp>
       <p:pic>
         <p:nvPicPr>
-          <p:cNvPr id="6" name="삽화:데이터_명령_두경로.svg" descr="illust_8337537018673814672_1791992996.png"/>
+          <p:cNvPr id="6" name="삽화:데이터_명령_두경로.svg" descr="illust_8707086184492634005_1791992996.png"/>
           <p:cNvPicPr>
             <a:picLocks noChangeAspect="1"/>
           </p:cNvPicPr>
@@ -46166,7 +46166,7 @@
       </p:sp>
       <p:pic>
         <p:nvPicPr>
-          <p:cNvPr id="6" name="삽화:흩어진정보.svg" descr="illust_2772956963749655633_1791959960.png"/>
+          <p:cNvPr id="6" name="삽화:흩어진정보.svg" descr="illust_1031674161506173301_1791959960.png"/>
           <p:cNvPicPr>
             <a:picLocks noChangeAspect="1"/>
           </p:cNvPicPr>
@@ -55142,7 +55142,7 @@
       </p:sp>
       <p:pic>
         <p:nvPicPr>
-          <p:cNvPr id="6" name="Picture 5" descr="illust_8022743237272539287_1791959960.png"/>
+          <p:cNvPr id="6" name="Picture 5" descr="illust_8284888985841970713_1791959960.png"/>
           <p:cNvPicPr>
             <a:picLocks noChangeAspect="1"/>
           </p:cNvPicPr>
@@ -55758,7 +55758,7 @@
       </p:sp>
       <p:pic>
         <p:nvPicPr>
-          <p:cNvPr id="6" name="삽화:지식그래프_지도.svg" descr="illust_19103172444957240_1791978726.png"/>
+          <p:cNvPr id="6" name="삽화:지식그래프_지도.svg" descr="illust_6088627814610418049_1791978726.png"/>
           <p:cNvPicPr>
             <a:picLocks noChangeAspect="1"/>
           </p:cNvPicPr>
@@ -57273,7 +57273,7 @@
                 <a:ea typeface="맑은 고딕"/>
                 <a:cs typeface="맑은 고딕"/>
               </a:rPr>
-              <a:t>• 저장된 관계를 그대로 쓰며, 반대 뜻의 관계를 따로 두지 않는다</a:t>
+              <a:t>• 저장된 관계를 그대로 쓰며, 역방향 관계를 따로 만들지 않는다</a:t>
             </a:r>
           </a:p>
           <a:p>
@@ -57611,7 +57611,7 @@
       </p:sp>
       <p:pic>
         <p:nvPicPr>
-          <p:cNvPr id="6" name="삽화:경로2_1.svg" descr="illust_7560945763465018946_1791992996.png"/>
+          <p:cNvPr id="6" name="삽화:경로2_1.svg" descr="illust_6321935017588451373_1791992996.png"/>
           <p:cNvPicPr>
             <a:picLocks noChangeAspect="1"/>
           </p:cNvPicPr>
@@ -58017,7 +58017,7 @@
       </p:sp>
       <p:pic>
         <p:nvPicPr>
-          <p:cNvPr id="6" name="삽화:경로2_2.svg" descr="illust_8104610223452671688_1791992996.png"/>
+          <p:cNvPr id="6" name="삽화:경로2_2.svg" descr="illust_6544321665801108343_1791992996.png"/>
           <p:cNvPicPr>
             <a:picLocks noChangeAspect="1"/>
           </p:cNvPicPr>
